--- a/docs/06-答辩演示.pptx
+++ b/docs/06-答辩演示.pptx
@@ -129,29 +129,29 @@
   <p:extLst>
     <p:ext uri="{521415D9-36F7-43E2-AB2F-B90AF26B5E84}">
       <p14:sectionLst xmlns:p14="http://schemas.microsoft.com/office/powerpoint/2010/main">
-        <p14:section name="封面" id="{741c44c1-284a-e9de-f67a-dd5f2b9a003c}">
+        <p14:section name="封面" id="{cd64ce53-dc84-2e15-868b-d5b09a381780}">
           <p14:sldIdLst>
             <p14:sldId id="256"/>
           </p14:sldIdLst>
         </p14:section>
-        <p14:section name="目录" id="{c50dac0e-3cee-4582-396d-ecc57a54ae3e}">
+        <p14:section name="目录" id="{c0a3d7b3-0240-deda-8f4f-529891d5181f}">
           <p14:sldIdLst>
             <p14:sldId id="257"/>
           </p14:sldIdLst>
         </p14:section>
-        <p14:section name="项目背景" id="{5408fca4-ac36-6a44-21ea-65686d322486}">
+        <p14:section name="项目背景" id="{23943169-ae85-d58a-d2c2-6ebc205b988e}">
           <p14:sldIdLst>
             <p14:sldId id="258"/>
           </p14:sldIdLst>
         </p14:section>
-        <p14:section name="需求分析" id="{fbb09d3a-bd6d-1274-f7cf-a9d88e83788c}">
+        <p14:section name="需求分析" id="{a1eca6e2-8125-9bb1-7b9b-410441d45c1c}">
           <p14:sldIdLst>
             <p14:sldId id="259"/>
             <p14:sldId id="260"/>
             <p14:sldId id="261"/>
           </p14:sldIdLst>
         </p14:section>
-        <p14:section name="系统设计" id="{a9e847cd-06c0-27b1-2bfd-3a88c467a991}">
+        <p14:section name="系统设计" id="{6451e2e5-8944-c460-fb86-2bb611b1e958}">
           <p14:sldIdLst>
             <p14:sldId id="262"/>
             <p14:sldId id="263"/>
@@ -160,7 +160,7 @@
             <p14:sldId id="266"/>
           </p14:sldIdLst>
         </p14:section>
-        <p14:section name="系统实现" id="{10c18260-08da-66a3-2615-20bd56e49afa}">
+        <p14:section name="系统实现" id="{7d07dc81-f8a4-0cae-2128-e496a40da9d1}">
           <p14:sldIdLst>
             <p14:sldId id="267"/>
             <p14:sldId id="268"/>
@@ -170,14 +170,14 @@
             <p14:sldId id="272"/>
           </p14:sldIdLst>
         </p14:section>
-        <p14:section name="软件测试" id="{ef4c7264-104d-5d39-e56a-cedcc384732d}">
+        <p14:section name="软件测试" id="{9fa8e19b-ae14-1cf1-80b4-fa947474bec3}">
           <p14:sldIdLst>
             <p14:sldId id="273"/>
             <p14:sldId id="274"/>
             <p14:sldId id="275"/>
           </p14:sldIdLst>
         </p14:section>
-        <p14:section name="总结展望" id="{051e34a4-60ed-5b1e-91ae-aba95776f7f2}">
+        <p14:section name="总结展望" id="{03bb4438-cf29-d8b8-aa70-57bb48b31be2}">
           <p14:sldIdLst>
             <p14:sldId id="276"/>
             <p14:sldId id="277"/>
@@ -2022,7 +2022,7 @@
           <a:p>
             <a:r>
               <a:rPr lang="en-US" dirty="0"/>
-              <a:t>项目从 9 月 14 日开始，历时约 6 周：第一周需求分析并评审，第二周完成概要和详细设计，随后前后端并行编码约两周半，测试和编码后期重叠进行，最后半周整理文档、准备答辩。四个里程碑分别是需求评审、设计评审、系统提测和项目验收。</a:t>
+              <a:t>项目从 9 月 18 日开始，历时约 6 周：第一周需求分析并评审，第二周完成概要和详细设计，随后前后端并行编码约两周半，测试和编码后期重叠进行，最后半周整理文档、准备答辩。四个里程碑分别是需求评审、设计评审、系统提测和项目验收。</a:t>
             </a:r>
             <a:endParaRPr lang="en-US" dirty="0"/>
           </a:p>
@@ -3784,7 +3784,7 @@
                   <a:srgbClr val="E5E7EB"/>
                 </a:solidFill>
               </a:rPr>
-              <a:t>姓名：【姓名】</a:t>
+              <a:t>姓名：李帆</a:t>
             </a:r>
             <a:endParaRPr lang="en-US" sz="1400" dirty="0"/>
           </a:p>
@@ -3801,7 +3801,7 @@
                   <a:srgbClr val="E5E7EB"/>
                 </a:solidFill>
               </a:rPr>
-              <a:t>学号：【学号】</a:t>
+              <a:t>学号：2412190102</a:t>
             </a:r>
             <a:endParaRPr lang="en-US" sz="1400" dirty="0"/>
           </a:p>
@@ -3818,7 +3818,7 @@
                   <a:srgbClr val="E5E7EB"/>
                 </a:solidFill>
               </a:rPr>
-              <a:t>班级：【班级】</a:t>
+              <a:t>班级：软件2402</a:t>
             </a:r>
             <a:endParaRPr lang="en-US" sz="1400" dirty="0"/>
           </a:p>
@@ -3850,7 +3850,7 @@
         <p:spPr>
           <a:xfrm>
             <a:off x="457200" y="4206240"/>
-            <a:ext cx="3657600" cy="274320"/>
+            <a:ext cx="4572000" cy="274320"/>
           </a:xfrm>
           <a:prstGeom prst="rect">
             <a:avLst/>
@@ -3871,7 +3871,7 @@
                   <a:srgbClr val="9CA3AF"/>
                 </a:solidFill>
               </a:rPr>
-              <a:t>2026 年 10 月</a:t>
+              <a:t>浙江工商大学  计算机科学与技术学院  ·  2026 年 10 月</a:t>
             </a:r>
             <a:endParaRPr lang="en-US" sz="1200" dirty="0"/>
           </a:p>

--- a/docs/06-答辩演示.pptx
+++ b/docs/06-答辩演示.pptx
@@ -129,29 +129,29 @@
   <p:extLst>
     <p:ext uri="{521415D9-36F7-43E2-AB2F-B90AF26B5E84}">
       <p14:sectionLst xmlns:p14="http://schemas.microsoft.com/office/powerpoint/2010/main">
-        <p14:section name="封面" id="{cd64ce53-dc84-2e15-868b-d5b09a381780}">
+        <p14:section name="封面" id="{79def296-16a0-66bc-f4c9-5888a2d44b45}">
           <p14:sldIdLst>
             <p14:sldId id="256"/>
           </p14:sldIdLst>
         </p14:section>
-        <p14:section name="目录" id="{c0a3d7b3-0240-deda-8f4f-529891d5181f}">
+        <p14:section name="目录" id="{670f17ea-773b-3d6e-bdf6-684b9b11a112}">
           <p14:sldIdLst>
             <p14:sldId id="257"/>
           </p14:sldIdLst>
         </p14:section>
-        <p14:section name="项目背景" id="{23943169-ae85-d58a-d2c2-6ebc205b988e}">
+        <p14:section name="项目背景" id="{87b09cfe-5788-aa60-4274-83f0a6b74c90}">
           <p14:sldIdLst>
             <p14:sldId id="258"/>
           </p14:sldIdLst>
         </p14:section>
-        <p14:section name="需求分析" id="{a1eca6e2-8125-9bb1-7b9b-410441d45c1c}">
+        <p14:section name="需求分析" id="{c5091fce-8db9-8781-b6ea-fdbf40555cbe}">
           <p14:sldIdLst>
             <p14:sldId id="259"/>
             <p14:sldId id="260"/>
             <p14:sldId id="261"/>
           </p14:sldIdLst>
         </p14:section>
-        <p14:section name="系统设计" id="{6451e2e5-8944-c460-fb86-2bb611b1e958}">
+        <p14:section name="系统设计" id="{a036bf6d-1f40-3dc4-205c-8ff6950be6f4}">
           <p14:sldIdLst>
             <p14:sldId id="262"/>
             <p14:sldId id="263"/>
@@ -160,7 +160,7 @@
             <p14:sldId id="266"/>
           </p14:sldIdLst>
         </p14:section>
-        <p14:section name="系统实现" id="{7d07dc81-f8a4-0cae-2128-e496a40da9d1}">
+        <p14:section name="系统实现" id="{b7298630-f78b-dfb7-35b0-75de531bbea5}">
           <p14:sldIdLst>
             <p14:sldId id="267"/>
             <p14:sldId id="268"/>
@@ -170,14 +170,14 @@
             <p14:sldId id="272"/>
           </p14:sldIdLst>
         </p14:section>
-        <p14:section name="软件测试" id="{9fa8e19b-ae14-1cf1-80b4-fa947474bec3}">
+        <p14:section name="软件测试" id="{21132a36-5c3c-0892-e196-400231ad9a35}">
           <p14:sldIdLst>
             <p14:sldId id="273"/>
             <p14:sldId id="274"/>
             <p14:sldId id="275"/>
           </p14:sldIdLst>
         </p14:section>
-        <p14:section name="总结展望" id="{03bb4438-cf29-d8b8-aa70-57bb48b31be2}">
+        <p14:section name="总结展望" id="{2b816f0f-d1c7-c52e-b065-a81d498009e8}">
           <p14:sldIdLst>
             <p14:sldId id="276"/>
             <p14:sldId id="277"/>
@@ -3835,7 +3835,7 @@
                   <a:srgbClr val="E5E7EB"/>
                 </a:solidFill>
               </a:rPr>
-              <a:t>指导教师：【指导教师】</a:t>
+              <a:t>指导教师：徐斌</a:t>
             </a:r>
             <a:endParaRPr lang="en-US" sz="1400" dirty="0"/>
           </a:p>
